--- a/docs/onboarding/02b-ticket-walkthrough.pptx
+++ b/docs/onboarding/02b-ticket-walkthrough.pptx
@@ -2797,7 +2797,7 @@
                 <a:ea typeface="Arial" pitchFamily="34" charset="-122"/>
                 <a:cs typeface="Arial" pitchFamily="34" charset="-120"/>
               </a:rPr>
-              <a:t>TRADE-IMPORTS-ANIMALS ONBOARDING · DEEP DIVE</a:t>
+              <a:t>TRADE-IMPORTS WORKSPACE ONBOARDING · DEEP DIVE</a:t>
             </a:r>
             <a:endParaRPr lang="en-US" sz="1400" dirty="0"/>
           </a:p>
@@ -4289,7 +4289,7 @@
                 <a:ea typeface="Arial" pitchFamily="34" charset="-122"/>
                 <a:cs typeface="Arial" pitchFamily="34" charset="-120"/>
               </a:rPr>
-              <a:t>trade-imports-animals onboarding · ticket deep dive</a:t>
+              <a:t>trade-imports workspace onboarding · ticket deep dive</a:t>
             </a:r>
             <a:endParaRPr lang="en-US" sz="900" dirty="0"/>
           </a:p>
@@ -5064,7 +5064,7 @@
                 <a:ea typeface="Arial" pitchFamily="34" charset="-122"/>
                 <a:cs typeface="Arial" pitchFamily="34" charset="-120"/>
               </a:rPr>
-              <a:t>trade-imports-animals onboarding · ticket deep dive</a:t>
+              <a:t>trade-imports workspace onboarding · ticket deep dive</a:t>
             </a:r>
             <a:endParaRPr lang="en-US" sz="900" dirty="0"/>
           </a:p>
@@ -6081,7 +6081,7 @@
                 <a:ea typeface="Arial" pitchFamily="34" charset="-122"/>
                 <a:cs typeface="Arial" pitchFamily="34" charset="-120"/>
               </a:rPr>
-              <a:t>trade-imports-animals onboarding · ticket deep dive</a:t>
+              <a:t>trade-imports workspace onboarding · ticket deep dive</a:t>
             </a:r>
             <a:endParaRPr lang="en-US" sz="900" dirty="0"/>
           </a:p>
@@ -6914,7 +6914,7 @@
                 <a:ea typeface="Arial" pitchFamily="34" charset="-122"/>
                 <a:cs typeface="Arial" pitchFamily="34" charset="-120"/>
               </a:rPr>
-              <a:t>trade-imports-animals onboarding · ticket deep dive</a:t>
+              <a:t>trade-imports workspace onboarding · ticket deep dive</a:t>
             </a:r>
             <a:endParaRPr lang="en-US" sz="900" dirty="0"/>
           </a:p>
@@ -7863,7 +7863,7 @@
                 <a:ea typeface="Arial" pitchFamily="34" charset="-122"/>
                 <a:cs typeface="Arial" pitchFamily="34" charset="-120"/>
               </a:rPr>
-              <a:t>trade-imports-animals onboarding · ticket deep dive</a:t>
+              <a:t>trade-imports workspace onboarding · ticket deep dive</a:t>
             </a:r>
             <a:endParaRPr lang="en-US" sz="900" dirty="0"/>
           </a:p>
@@ -8547,7 +8547,7 @@
                 <a:ea typeface="Arial" pitchFamily="34" charset="-122"/>
                 <a:cs typeface="Arial" pitchFamily="34" charset="-120"/>
               </a:rPr>
-              <a:t>trade-imports-animals onboarding · ticket deep dive</a:t>
+              <a:t>trade-imports workspace onboarding · ticket deep dive</a:t>
             </a:r>
             <a:endParaRPr lang="en-US" sz="900" dirty="0"/>
           </a:p>
@@ -9505,7 +9505,7 @@
                 <a:ea typeface="Arial" pitchFamily="34" charset="-122"/>
                 <a:cs typeface="Arial" pitchFamily="34" charset="-120"/>
               </a:rPr>
-              <a:t>trade-imports-animals onboarding · ticket deep dive</a:t>
+              <a:t>trade-imports workspace onboarding · ticket deep dive</a:t>
             </a:r>
             <a:endParaRPr lang="en-US" sz="900" dirty="0"/>
           </a:p>
@@ -10224,7 +10224,7 @@
                 <a:ea typeface="Arial" pitchFamily="34" charset="-122"/>
                 <a:cs typeface="Arial" pitchFamily="34" charset="-120"/>
               </a:rPr>
-              <a:t>trade-imports-animals onboarding · ticket deep dive</a:t>
+              <a:t>trade-imports workspace onboarding · ticket deep dive</a:t>
             </a:r>
             <a:endParaRPr lang="en-US" sz="900" dirty="0"/>
           </a:p>
@@ -10988,7 +10988,7 @@
                 <a:ea typeface="Arial" pitchFamily="34" charset="-122"/>
                 <a:cs typeface="Arial" pitchFamily="34" charset="-120"/>
               </a:rPr>
-              <a:t>trade-imports-animals onboarding · ticket deep dive</a:t>
+              <a:t>trade-imports workspace onboarding · ticket deep dive</a:t>
             </a:r>
             <a:endParaRPr lang="en-US" sz="900" dirty="0"/>
           </a:p>
@@ -11786,7 +11786,7 @@
                 <a:ea typeface="Arial" pitchFamily="34" charset="-122"/>
                 <a:cs typeface="Arial" pitchFamily="34" charset="-120"/>
               </a:rPr>
-              <a:t>trade-imports-animals onboarding · ticket deep dive</a:t>
+              <a:t>trade-imports workspace onboarding · ticket deep dive</a:t>
             </a:r>
             <a:endParaRPr lang="en-US" sz="900" dirty="0"/>
           </a:p>
@@ -12407,7 +12407,7 @@
                 <a:ea typeface="Arial" pitchFamily="34" charset="-122"/>
                 <a:cs typeface="Arial" pitchFamily="34" charset="-120"/>
               </a:rPr>
-              <a:t>trade-imports-animals onboarding · ticket deep dive</a:t>
+              <a:t>trade-imports workspace onboarding · ticket deep dive</a:t>
             </a:r>
             <a:endParaRPr lang="en-US" sz="900" dirty="0"/>
           </a:p>
@@ -12842,7 +12842,7 @@
                 <a:ea typeface="Arial" pitchFamily="34" charset="-122"/>
                 <a:cs typeface="Arial" pitchFamily="34" charset="-120"/>
               </a:rPr>
-              <a:t>trade-imports-animals onboarding · ticket deep dive</a:t>
+              <a:t>trade-imports workspace onboarding · ticket deep dive</a:t>
             </a:r>
             <a:endParaRPr lang="en-US" sz="900" dirty="0"/>
           </a:p>
@@ -13443,7 +13443,7 @@
                 <a:ea typeface="Arial" pitchFamily="34" charset="-122"/>
                 <a:cs typeface="Arial" pitchFamily="34" charset="-120"/>
               </a:rPr>
-              <a:t>trade-imports-animals onboarding · ticket deep dive</a:t>
+              <a:t>trade-imports workspace onboarding · ticket deep dive</a:t>
             </a:r>
             <a:endParaRPr lang="en-US" sz="900" dirty="0"/>
           </a:p>
@@ -14452,7 +14452,7 @@
                 <a:ea typeface="Arial" pitchFamily="34" charset="-122"/>
                 <a:cs typeface="Arial" pitchFamily="34" charset="-120"/>
               </a:rPr>
-              <a:t>trade-imports-animals onboarding · ticket deep dive</a:t>
+              <a:t>trade-imports workspace onboarding · ticket deep dive</a:t>
             </a:r>
             <a:endParaRPr lang="en-US" sz="900" dirty="0"/>
           </a:p>
@@ -15142,7 +15142,7 @@
                 <a:ea typeface="Arial" pitchFamily="34" charset="-122"/>
                 <a:cs typeface="Arial" pitchFamily="34" charset="-120"/>
               </a:rPr>
-              <a:t>trade-imports-animals onboarding · ticket deep dive</a:t>
+              <a:t>trade-imports workspace onboarding · ticket deep dive</a:t>
             </a:r>
             <a:endParaRPr lang="en-US" sz="900" dirty="0"/>
           </a:p>
@@ -15958,7 +15958,7 @@
                 <a:ea typeface="Arial" pitchFamily="34" charset="-122"/>
                 <a:cs typeface="Arial" pitchFamily="34" charset="-120"/>
               </a:rPr>
-              <a:t>trade-imports-animals onboarding · ticket deep dive</a:t>
+              <a:t>trade-imports workspace onboarding · ticket deep dive</a:t>
             </a:r>
             <a:endParaRPr lang="en-US" sz="900" dirty="0"/>
           </a:p>
@@ -16726,7 +16726,7 @@
                 <a:ea typeface="Arial" pitchFamily="34" charset="-122"/>
                 <a:cs typeface="Arial" pitchFamily="34" charset="-120"/>
               </a:rPr>
-              <a:t>trade-imports-animals onboarding · ticket deep dive</a:t>
+              <a:t>trade-imports workspace onboarding · ticket deep dive</a:t>
             </a:r>
             <a:endParaRPr lang="en-US" sz="900" dirty="0"/>
           </a:p>
@@ -17566,7 +17566,7 @@
                 <a:ea typeface="Arial" pitchFamily="34" charset="-122"/>
                 <a:cs typeface="Arial" pitchFamily="34" charset="-120"/>
               </a:rPr>
-              <a:t>trade-imports-animals onboarding · ticket deep dive</a:t>
+              <a:t>trade-imports workspace onboarding · ticket deep dive</a:t>
             </a:r>
             <a:endParaRPr lang="en-US" sz="900" dirty="0"/>
           </a:p>
